--- a/submission-media/ENGR5513-FinalBoss-Presentation.pptx
+++ b/submission-media/ENGR5513-FinalBoss-Presentation.pptx
@@ -1877,6 +1877,10 @@
             <a:prstDash val="lgDash"/>
           </a:ln>
         </p:spPr>
+        <p:txBody>
+          <a:bodyPr/>
+          <a:p/>
+        </p:txBody>
       </p:sp>
       <p:sp>
         <p:nvSpPr>
@@ -1911,7 +1915,7 @@
                 <a:ea typeface="Calibri" pitchFamily="34" charset="-122"/>
                 <a:cs typeface="Calibri" pitchFamily="34" charset="-120"/>
               </a:rPr>
-              <a:t>Forrest Wright — Lipscomb MSAI ’26      ENGR 5513, Summer 2026 — Dr. Steve Nordstrom</a:t>
+              <a:t>Forrest Wright — Lipscomb University      ENGR 5513, Summer 2026 — Dr. Steve Nordstrom</a:t>
             </a:r>
             <a:endParaRPr lang="en-US" sz="1150" dirty="0"/>
           </a:p>
@@ -1919,7 +1923,7 @@
       </p:sp>
       <p:pic>
         <p:nvPicPr>
-          <p:cNvPr id="8" name="Image 0" descr="C:/Users/User/CoworkProjects/_wrt-shots/deck-out/title-screen-prod.png">    </p:cNvPr>
+          <p:cNvPr id="8" name="Image 0" descr="">    </p:cNvPr>
           <p:cNvPicPr>
             <a:picLocks noChangeAspect="1"/>
           </p:cNvPicPr>
@@ -1969,6 +1973,10 @@
             <a:prstDash val="solid"/>
           </a:ln>
         </p:spPr>
+        <p:txBody>
+          <a:bodyPr/>
+          <a:p/>
+        </p:txBody>
       </p:sp>
       <p:sp>
         <p:nvSpPr>
@@ -2465,7 +2473,7 @@
       </p:sp>
       <p:pic>
         <p:nvPicPr>
-          <p:cNvPr id="8" name="Image 0" descr="C:/Users/User/CoworkProjects/weekend-road-trip/submission-media/weekend-road-trip-ghost-race.png">    </p:cNvPr>
+          <p:cNvPr id="8" name="Image 0" descr="">    </p:cNvPr>
           <p:cNvPicPr>
             <a:picLocks noChangeAspect="1"/>
           </p:cNvPicPr>
@@ -2515,6 +2523,10 @@
             <a:prstDash val="solid"/>
           </a:ln>
         </p:spPr>
+        <p:txBody>
+          <a:bodyPr/>
+          <a:p/>
+        </p:txBody>
       </p:sp>
       <p:sp>
         <p:nvSpPr>
@@ -2633,6 +2645,10 @@
             <a:prstDash val="lgDash"/>
           </a:ln>
         </p:spPr>
+        <p:txBody>
+          <a:bodyPr/>
+          <a:p/>
+        </p:txBody>
       </p:sp>
       <p:sp>
         <p:nvSpPr>
@@ -2667,7 +2683,7 @@
                 <a:ea typeface="Calibri" pitchFamily="34" charset="-122"/>
                 <a:cs typeface="Calibri" pitchFamily="34" charset="-120"/>
               </a:rPr>
-              <a:t>Forrest Wright · ENGR 5513 Applied AI in Engineering · Lipscomb MSAI · Summer 2026</a:t>
+              <a:t>Forrest Wright · ENGR 5513 Applied AI in Engineering · Lipscomb University · Summer 2026</a:t>
             </a:r>
             <a:endParaRPr lang="en-US" sz="1000" dirty="0"/>
           </a:p>
@@ -2785,7 +2801,7 @@
       </p:sp>
       <p:pic>
         <p:nvPicPr>
-          <p:cNvPr id="4" name="Image 0" descr="C:/Users/User/CoworkProjects/weekend-road-trip/submission-media/hero-lanes.png">    </p:cNvPr>
+          <p:cNvPr id="4" name="Image 0" descr="">    </p:cNvPr>
           <p:cNvPicPr>
             <a:picLocks noChangeAspect="1"/>
           </p:cNvPicPr>
@@ -2835,6 +2851,10 @@
             <a:prstDash val="solid"/>
           </a:ln>
         </p:spPr>
+        <p:txBody>
+          <a:bodyPr/>
+          <a:p/>
+        </p:txBody>
       </p:sp>
       <p:sp>
         <p:nvSpPr>
@@ -2901,6 +2921,10 @@
             <a:prstDash val="solid"/>
           </a:ln>
         </p:spPr>
+        <p:txBody>
+          <a:bodyPr/>
+          <a:p/>
+        </p:txBody>
       </p:sp>
       <p:sp>
         <p:nvSpPr>
@@ -3006,6 +3030,10 @@
             <a:prstDash val="solid"/>
           </a:ln>
         </p:spPr>
+        <p:txBody>
+          <a:bodyPr/>
+          <a:p/>
+        </p:txBody>
       </p:sp>
       <p:sp>
         <p:nvSpPr>
@@ -3111,6 +3139,10 @@
             <a:prstDash val="solid"/>
           </a:ln>
         </p:spPr>
+        <p:txBody>
+          <a:bodyPr/>
+          <a:p/>
+        </p:txBody>
       </p:sp>
       <p:sp>
         <p:nvSpPr>
@@ -5864,7 +5896,7 @@
       </p:sp>
       <p:pic>
         <p:nvPicPr>
-          <p:cNvPr id="12" name="Image 0" descr="C:/Users/User/CoworkProjects/_wrt-shots/deck-out/vercel-deployments-strip.png">    </p:cNvPr>
+          <p:cNvPr id="12" name="Image 0" descr="">    </p:cNvPr>
           <p:cNvPicPr>
             <a:picLocks noChangeAspect="1"/>
           </p:cNvPicPr>
@@ -5914,6 +5946,10 @@
             <a:prstDash val="solid"/>
           </a:ln>
         </p:spPr>
+        <p:txBody>
+          <a:bodyPr/>
+          <a:p/>
+        </p:txBody>
       </p:sp>
       <p:sp>
         <p:nvSpPr>
@@ -5956,7 +5992,7 @@
       </p:sp>
       <p:pic>
         <p:nvPicPr>
-          <p:cNvPr id="15" name="Image 1" descr="C:/Users/User/CoworkProjects/final-boss-submission/screenshots/06-preview-deployment-colorway-cropped.png">    </p:cNvPr>
+          <p:cNvPr id="15" name="Image 1" descr="">    </p:cNvPr>
           <p:cNvPicPr>
             <a:picLocks noChangeAspect="1"/>
           </p:cNvPicPr>
@@ -6006,6 +6042,10 @@
             <a:prstDash val="solid"/>
           </a:ln>
         </p:spPr>
+        <p:txBody>
+          <a:bodyPr/>
+          <a:p/>
+        </p:txBody>
       </p:sp>
       <p:sp>
         <p:nvSpPr>
@@ -6260,6 +6300,10 @@
             <a:prstDash val="solid"/>
           </a:ln>
         </p:spPr>
+        <p:txBody>
+          <a:bodyPr/>
+          <a:p/>
+        </p:txBody>
       </p:sp>
       <p:sp>
         <p:nvSpPr>
@@ -6340,6 +6384,10 @@
             <a:tailEnd type="triangle"/>
           </a:ln>
         </p:spPr>
+        <p:txBody>
+          <a:bodyPr/>
+          <a:p/>
+        </p:txBody>
       </p:sp>
       <p:sp>
         <p:nvSpPr>
@@ -6364,6 +6412,10 @@
             <a:tailEnd type="triangle"/>
           </a:ln>
         </p:spPr>
+        <p:txBody>
+          <a:bodyPr/>
+          <a:p/>
+        </p:txBody>
       </p:sp>
       <p:sp>
         <p:nvSpPr>
@@ -6388,6 +6440,10 @@
             <a:tailEnd type="triangle"/>
           </a:ln>
         </p:spPr>
+        <p:txBody>
+          <a:bodyPr/>
+          <a:p/>
+        </p:txBody>
       </p:sp>
       <p:sp>
         <p:nvSpPr>
@@ -6415,6 +6471,10 @@
             <a:prstDash val="solid"/>
           </a:ln>
         </p:spPr>
+        <p:txBody>
+          <a:bodyPr/>
+          <a:p/>
+        </p:txBody>
       </p:sp>
       <p:sp>
         <p:nvSpPr>
@@ -6576,6 +6636,10 @@
             <a:prstDash val="solid"/>
           </a:ln>
         </p:spPr>
+        <p:txBody>
+          <a:bodyPr/>
+          <a:p/>
+        </p:txBody>
       </p:sp>
       <p:sp>
         <p:nvSpPr>
@@ -6737,6 +6801,10 @@
             <a:prstDash val="solid"/>
           </a:ln>
         </p:spPr>
+        <p:txBody>
+          <a:bodyPr/>
+          <a:p/>
+        </p:txBody>
       </p:sp>
       <p:sp>
         <p:nvSpPr>
@@ -7086,6 +7154,10 @@
             <a:prstDash val="solid"/>
           </a:ln>
         </p:spPr>
+        <p:txBody>
+          <a:bodyPr/>
+          <a:p/>
+        </p:txBody>
       </p:sp>
       <p:sp>
         <p:nvSpPr>
@@ -7166,6 +7238,10 @@
             <a:tailEnd type="triangle"/>
           </a:ln>
         </p:spPr>
+        <p:txBody>
+          <a:bodyPr/>
+          <a:p/>
+        </p:txBody>
       </p:sp>
       <p:sp>
         <p:nvSpPr>
@@ -7193,6 +7269,10 @@
             <a:prstDash val="solid"/>
           </a:ln>
         </p:spPr>
+        <p:txBody>
+          <a:bodyPr/>
+          <a:p/>
+        </p:txBody>
       </p:sp>
       <p:sp>
         <p:nvSpPr>
@@ -7273,6 +7353,10 @@
             <a:tailEnd type="triangle"/>
           </a:ln>
         </p:spPr>
+        <p:txBody>
+          <a:bodyPr/>
+          <a:p/>
+        </p:txBody>
       </p:sp>
       <p:sp>
         <p:nvSpPr>
@@ -7300,6 +7384,10 @@
             <a:prstDash val="solid"/>
           </a:ln>
         </p:spPr>
+        <p:txBody>
+          <a:bodyPr/>
+          <a:p/>
+        </p:txBody>
       </p:sp>
       <p:sp>
         <p:nvSpPr>
@@ -7380,6 +7468,10 @@
             <a:tailEnd type="triangle"/>
           </a:ln>
         </p:spPr>
+        <p:txBody>
+          <a:bodyPr/>
+          <a:p/>
+        </p:txBody>
       </p:sp>
       <p:sp>
         <p:nvSpPr>
@@ -7407,6 +7499,10 @@
             <a:prstDash val="solid"/>
           </a:ln>
         </p:spPr>
+        <p:txBody>
+          <a:bodyPr/>
+          <a:p/>
+        </p:txBody>
       </p:sp>
       <p:sp>
         <p:nvSpPr>
@@ -7487,6 +7583,10 @@
             <a:tailEnd type="triangle"/>
           </a:ln>
         </p:spPr>
+        <p:txBody>
+          <a:bodyPr/>
+          <a:p/>
+        </p:txBody>
       </p:sp>
       <p:sp>
         <p:nvSpPr>
@@ -7514,6 +7614,10 @@
             <a:prstDash val="solid"/>
           </a:ln>
         </p:spPr>
+        <p:txBody>
+          <a:bodyPr/>
+          <a:p/>
+        </p:txBody>
       </p:sp>
       <p:sp>
         <p:nvSpPr>
@@ -7597,6 +7701,10 @@
             <a:prstDash val="solid"/>
           </a:ln>
         </p:spPr>
+        <p:txBody>
+          <a:bodyPr/>
+          <a:p/>
+        </p:txBody>
       </p:sp>
       <p:sp>
         <p:nvSpPr>
@@ -7716,6 +7824,10 @@
             <a:prstDash val="solid"/>
           </a:ln>
         </p:spPr>
+        <p:txBody>
+          <a:bodyPr/>
+          <a:p/>
+        </p:txBody>
       </p:sp>
       <p:sp>
         <p:nvSpPr>
@@ -7835,6 +7947,10 @@
             <a:prstDash val="solid"/>
           </a:ln>
         </p:spPr>
+        <p:txBody>
+          <a:bodyPr/>
+          <a:p/>
+        </p:txBody>
       </p:sp>
       <p:sp>
         <p:nvSpPr>
@@ -7954,6 +8070,10 @@
             <a:prstDash val="solid"/>
           </a:ln>
         </p:spPr>
+        <p:txBody>
+          <a:bodyPr/>
+          <a:p/>
+        </p:txBody>
       </p:sp>
       <p:sp>
         <p:nvSpPr>
@@ -8073,6 +8193,10 @@
             <a:prstDash val="solid"/>
           </a:ln>
         </p:spPr>
+        <p:txBody>
+          <a:bodyPr/>
+          <a:p/>
+        </p:txBody>
       </p:sp>
       <p:sp>
         <p:nvSpPr>
@@ -8192,6 +8316,10 @@
             <a:prstDash val="solid"/>
           </a:ln>
         </p:spPr>
+        <p:txBody>
+          <a:bodyPr/>
+          <a:p/>
+        </p:txBody>
       </p:sp>
       <p:sp>
         <p:nvSpPr>
@@ -8311,6 +8439,10 @@
             <a:prstDash val="solid"/>
           </a:ln>
         </p:spPr>
+        <p:txBody>
+          <a:bodyPr/>
+          <a:p/>
+        </p:txBody>
       </p:sp>
       <p:sp>
         <p:nvSpPr>
@@ -8618,6 +8750,10 @@
             <a:prstDash val="solid"/>
           </a:ln>
         </p:spPr>
+        <p:txBody>
+          <a:bodyPr/>
+          <a:p/>
+        </p:txBody>
       </p:sp>
       <p:sp>
         <p:nvSpPr>
@@ -8740,6 +8876,10 @@
             <a:prstDash val="solid"/>
           </a:ln>
         </p:spPr>
+        <p:txBody>
+          <a:bodyPr/>
+          <a:p/>
+        </p:txBody>
       </p:sp>
       <p:sp>
         <p:nvSpPr>
@@ -8877,7 +9017,7 @@
       </p:sp>
       <p:pic>
         <p:nvPicPr>
-          <p:cNvPr id="11" name="Image 0" descr="C:/Users/User/CoworkProjects/_wrt-shots/deck-out/waitlist-live.png">    </p:cNvPr>
+          <p:cNvPr id="11" name="Image 0" descr="">    </p:cNvPr>
           <p:cNvPicPr>
             <a:picLocks noChangeAspect="1"/>
           </p:cNvPicPr>
@@ -8927,6 +9067,10 @@
             <a:prstDash val="solid"/>
           </a:ln>
         </p:spPr>
+        <p:txBody>
+          <a:bodyPr/>
+          <a:p/>
+        </p:txBody>
       </p:sp>
       <p:sp>
         <p:nvSpPr>
@@ -8969,7 +9113,7 @@
       </p:sp>
       <p:pic>
         <p:nvPicPr>
-          <p:cNvPr id="14" name="Image 1" descr="C:/Users/User/CoworkProjects/_wrt-shots/deck-out/neon-tables-crop.png">    </p:cNvPr>
+          <p:cNvPr id="14" name="Image 1" descr="">    </p:cNvPr>
           <p:cNvPicPr>
             <a:picLocks noChangeAspect="1"/>
           </p:cNvPicPr>
@@ -9019,6 +9163,10 @@
             <a:prstDash val="solid"/>
           </a:ln>
         </p:spPr>
+        <p:txBody>
+          <a:bodyPr/>
+          <a:p/>
+        </p:txBody>
       </p:sp>
       <p:sp>
         <p:nvSpPr>
@@ -9507,6 +9655,10 @@
             <a:prstDash val="solid"/>
           </a:ln>
         </p:spPr>
+        <p:txBody>
+          <a:bodyPr/>
+          <a:p/>
+        </p:txBody>
       </p:sp>
       <p:sp>
         <p:nvSpPr>
@@ -9676,6 +9828,10 @@
             <a:prstDash val="solid"/>
           </a:ln>
         </p:spPr>
+        <p:txBody>
+          <a:bodyPr/>
+          <a:p/>
+        </p:txBody>
       </p:sp>
       <p:sp>
         <p:nvSpPr>
@@ -10391,7 +10547,7 @@
       </p:sp>
       <p:pic>
         <p:nvPicPr>
-          <p:cNvPr id="17" name="Image 0" descr="C:/Users/User/CoworkProjects/_wrt-shots/deck-out/title-screen-prod.png">    </p:cNvPr>
+          <p:cNvPr id="17" name="Image 0" descr="">    </p:cNvPr>
           <p:cNvPicPr>
             <a:picLocks noChangeAspect="1"/>
           </p:cNvPicPr>
@@ -10441,6 +10597,10 @@
             <a:prstDash val="solid"/>
           </a:ln>
         </p:spPr>
+        <p:txBody>
+          <a:bodyPr/>
+          <a:p/>
+        </p:txBody>
       </p:sp>
       <p:sp>
         <p:nvSpPr>
@@ -10468,6 +10628,10 @@
             <a:prstDash val="solid"/>
           </a:ln>
         </p:spPr>
+        <p:txBody>
+          <a:bodyPr/>
+          <a:p/>
+        </p:txBody>
       </p:sp>
       <p:sp>
         <p:nvSpPr>

--- a/submission-media/ENGR5513-FinalBoss-Presentation.pptx
+++ b/submission-media/ENGR5513-FinalBoss-Presentation.pptx
@@ -9111,30 +9111,6 @@
           </a:p>
         </p:txBody>
       </p:sp>
-      <p:pic>
-        <p:nvPicPr>
-          <p:cNvPr id="14" name="Image 1" descr="">    </p:cNvPr>
-          <p:cNvPicPr>
-            <a:picLocks noChangeAspect="1"/>
-          </p:cNvPicPr>
-          <p:nvPr/>
-        </p:nvPicPr>
-        <p:blipFill>
-          <a:blip r:embed="rId2"/>
-          <a:stretch>
-            <a:fillRect/>
-          </a:stretch>
-        </p:blipFill>
-        <p:spPr>
-          <a:xfrm>
-            <a:off x="5257800" y="3767328"/>
-            <a:ext cx="3429000" cy="914400"/>
-          </a:xfrm>
-          <a:prstGeom prst="rect">
-            <a:avLst/>
-          </a:prstGeom>
-        </p:spPr>
-      </p:pic>
       <p:sp>
         <p:nvSpPr>
           <p:cNvPr id="15" name="Shape 11"/>
@@ -9201,7 +9177,7 @@
                 <a:ea typeface="Consolas" pitchFamily="34" charset="-122"/>
                 <a:cs typeface="Consolas" pitchFamily="34" charset="-120"/>
               </a:rPr>
-              <a:t>Neon console — email_signups rows, all three tables</a:t>
+              <a:t>Neon console screenshot omitted from the public copy (it showed stored signup rows)</a:t>
             </a:r>
             <a:endParaRPr lang="en-US" sz="800" dirty="0"/>
           </a:p>
